--- a/Lectures/Chunk 8  - 1D Numpy.pptx
+++ b/Lectures/Chunk 8  - 1D Numpy.pptx
@@ -221,12 +221,12 @@
   <pc:docChgLst>
     <pc:chgData name="Jonathan Bollig" userId="8b5d0afe-f106-45e0-8c3f-fd98fa124db1" providerId="ADAL" clId="{B2469FA9-EBD8-4834-A16D-CBF8EFC907DD}"/>
     <pc:docChg chg="undo custSel addSld delSld modSld">
-      <pc:chgData name="Jonathan Bollig" userId="8b5d0afe-f106-45e0-8c3f-fd98fa124db1" providerId="ADAL" clId="{B2469FA9-EBD8-4834-A16D-CBF8EFC907DD}" dt="2025-10-05T11:05:25.077" v="3070" actId="20577"/>
+      <pc:chgData name="Jonathan Bollig" userId="8b5d0afe-f106-45e0-8c3f-fd98fa124db1" providerId="ADAL" clId="{B2469FA9-EBD8-4834-A16D-CBF8EFC907DD}" dt="2025-10-07T00:02:27.634" v="3072" actId="20577"/>
       <pc:docMkLst>
         <pc:docMk/>
       </pc:docMkLst>
       <pc:sldChg chg="modSp mod">
-        <pc:chgData name="Jonathan Bollig" userId="8b5d0afe-f106-45e0-8c3f-fd98fa124db1" providerId="ADAL" clId="{B2469FA9-EBD8-4834-A16D-CBF8EFC907DD}" dt="2025-10-04T16:01:07.110" v="691" actId="20577"/>
+        <pc:chgData name="Jonathan Bollig" userId="8b5d0afe-f106-45e0-8c3f-fd98fa124db1" providerId="ADAL" clId="{B2469FA9-EBD8-4834-A16D-CBF8EFC907DD}" dt="2025-10-07T00:02:27.634" v="3072" actId="20577"/>
         <pc:sldMkLst>
           <pc:docMk/>
           <pc:sldMk cId="836289018" sldId="256"/>
@@ -237,6 +237,14 @@
             <pc:docMk/>
             <pc:sldMk cId="836289018" sldId="256"/>
             <ac:spMk id="2" creationId="{40F72F59-52B3-6063-A2E3-2AA45125A99B}"/>
+          </ac:spMkLst>
+        </pc:spChg>
+        <pc:spChg chg="mod">
+          <ac:chgData name="Jonathan Bollig" userId="8b5d0afe-f106-45e0-8c3f-fd98fa124db1" providerId="ADAL" clId="{B2469FA9-EBD8-4834-A16D-CBF8EFC907DD}" dt="2025-10-07T00:02:27.634" v="3072" actId="20577"/>
+          <ac:spMkLst>
+            <pc:docMk/>
+            <pc:sldMk cId="836289018" sldId="256"/>
+            <ac:spMk id="3" creationId="{62F76653-44B5-8707-B179-FDB90CB514B7}"/>
           </ac:spMkLst>
         </pc:spChg>
       </pc:sldChg>
@@ -276,14 +284,6 @@
             <ac:spMk id="5" creationId="{592982AF-81D7-82EF-C090-9E24668A188C}"/>
           </ac:spMkLst>
         </pc:spChg>
-        <pc:picChg chg="add del mod">
-          <ac:chgData name="Jonathan Bollig" userId="8b5d0afe-f106-45e0-8c3f-fd98fa124db1" providerId="ADAL" clId="{B2469FA9-EBD8-4834-A16D-CBF8EFC907DD}" dt="2025-10-04T13:53:35.689" v="162" actId="478"/>
-          <ac:picMkLst>
-            <pc:docMk/>
-            <pc:sldMk cId="2138807736" sldId="267"/>
-            <ac:picMk id="4" creationId="{2E2DF16C-43F8-A2BF-AB9E-D29595CDA04E}"/>
-          </ac:picMkLst>
-        </pc:picChg>
         <pc:picChg chg="add mod">
           <ac:chgData name="Jonathan Bollig" userId="8b5d0afe-f106-45e0-8c3f-fd98fa124db1" providerId="ADAL" clId="{B2469FA9-EBD8-4834-A16D-CBF8EFC907DD}" dt="2025-10-04T13:54:40.946" v="165" actId="1076"/>
           <ac:picMkLst>
@@ -306,22 +306,6 @@
           <pc:docMk/>
           <pc:sldMk cId="2113368255" sldId="269"/>
         </pc:sldMkLst>
-        <pc:spChg chg="del">
-          <ac:chgData name="Jonathan Bollig" userId="8b5d0afe-f106-45e0-8c3f-fd98fa124db1" providerId="ADAL" clId="{B2469FA9-EBD8-4834-A16D-CBF8EFC907DD}" dt="2025-10-04T12:20:52.590" v="157" actId="21"/>
-          <ac:spMkLst>
-            <pc:docMk/>
-            <pc:sldMk cId="2113368255" sldId="269"/>
-            <ac:spMk id="9" creationId="{0048013B-D3D4-9DD6-10CF-DB86C4AFBFF0}"/>
-          </ac:spMkLst>
-        </pc:spChg>
-        <pc:spChg chg="add mod">
-          <ac:chgData name="Jonathan Bollig" userId="8b5d0afe-f106-45e0-8c3f-fd98fa124db1" providerId="ADAL" clId="{B2469FA9-EBD8-4834-A16D-CBF8EFC907DD}" dt="2025-10-04T12:20:53.723" v="158"/>
-          <ac:spMkLst>
-            <pc:docMk/>
-            <pc:sldMk cId="2113368255" sldId="269"/>
-            <ac:spMk id="21" creationId="{0048013B-D3D4-9DD6-10CF-DB86C4AFBFF0}"/>
-          </ac:spMkLst>
-        </pc:spChg>
       </pc:sldChg>
       <pc:sldChg chg="addSp modSp new mod">
         <pc:chgData name="Jonathan Bollig" userId="8b5d0afe-f106-45e0-8c3f-fd98fa124db1" providerId="ADAL" clId="{B2469FA9-EBD8-4834-A16D-CBF8EFC907DD}" dt="2025-10-04T15:58:44.305" v="683" actId="20577"/>
@@ -408,30 +392,6 @@
             <ac:spMk id="6" creationId="{CAF2D3D8-ADED-7DE1-AAB1-7E6D40505393}"/>
           </ac:spMkLst>
         </pc:spChg>
-        <pc:picChg chg="add del mod">
-          <ac:chgData name="Jonathan Bollig" userId="8b5d0afe-f106-45e0-8c3f-fd98fa124db1" providerId="ADAL" clId="{B2469FA9-EBD8-4834-A16D-CBF8EFC907DD}" dt="2025-10-04T16:26:17.132" v="1596" actId="478"/>
-          <ac:picMkLst>
-            <pc:docMk/>
-            <pc:sldMk cId="3446547959" sldId="271"/>
-            <ac:picMk id="11" creationId="{BE60B151-66C1-5DFF-68E4-3C238C21534D}"/>
-          </ac:picMkLst>
-        </pc:picChg>
-        <pc:picChg chg="add del mod">
-          <ac:chgData name="Jonathan Bollig" userId="8b5d0afe-f106-45e0-8c3f-fd98fa124db1" providerId="ADAL" clId="{B2469FA9-EBD8-4834-A16D-CBF8EFC907DD}" dt="2025-10-04T16:26:26.917" v="1598" actId="478"/>
-          <ac:picMkLst>
-            <pc:docMk/>
-            <pc:sldMk cId="3446547959" sldId="271"/>
-            <ac:picMk id="13" creationId="{198AA53E-207C-20EF-44C5-AB2EEA97E11B}"/>
-          </ac:picMkLst>
-        </pc:picChg>
-        <pc:picChg chg="add del mod">
-          <ac:chgData name="Jonathan Bollig" userId="8b5d0afe-f106-45e0-8c3f-fd98fa124db1" providerId="ADAL" clId="{B2469FA9-EBD8-4834-A16D-CBF8EFC907DD}" dt="2025-10-04T16:27:07.230" v="1606" actId="478"/>
-          <ac:picMkLst>
-            <pc:docMk/>
-            <pc:sldMk cId="3446547959" sldId="271"/>
-            <ac:picMk id="16" creationId="{7D874E87-D468-AC2D-EDE0-D1B2599CF50B}"/>
-          </ac:picMkLst>
-        </pc:picChg>
         <pc:picChg chg="add mod">
           <ac:chgData name="Jonathan Bollig" userId="8b5d0afe-f106-45e0-8c3f-fd98fa124db1" providerId="ADAL" clId="{B2469FA9-EBD8-4834-A16D-CBF8EFC907DD}" dt="2025-10-04T16:34:15.598" v="1832" actId="14100"/>
           <ac:picMkLst>
@@ -448,22 +408,6 @@
             <ac:picMk id="25" creationId="{7A4B4F34-E848-C1A1-D285-2F37621FE131}"/>
           </ac:picMkLst>
         </pc:picChg>
-        <pc:picChg chg="add del mod">
-          <ac:chgData name="Jonathan Bollig" userId="8b5d0afe-f106-45e0-8c3f-fd98fa124db1" providerId="ADAL" clId="{B2469FA9-EBD8-4834-A16D-CBF8EFC907DD}" dt="2025-10-04T16:34:06.162" v="1829" actId="478"/>
-          <ac:picMkLst>
-            <pc:docMk/>
-            <pc:sldMk cId="3446547959" sldId="271"/>
-            <ac:picMk id="27" creationId="{B0542399-E10F-514E-8679-7070D59FAA65}"/>
-          </ac:picMkLst>
-        </pc:picChg>
-        <pc:cxnChg chg="add del mod">
-          <ac:chgData name="Jonathan Bollig" userId="8b5d0afe-f106-45e0-8c3f-fd98fa124db1" providerId="ADAL" clId="{B2469FA9-EBD8-4834-A16D-CBF8EFC907DD}" dt="2025-10-04T16:04:29.262" v="917" actId="478"/>
-          <ac:cxnSpMkLst>
-            <pc:docMk/>
-            <pc:sldMk cId="3446547959" sldId="271"/>
-            <ac:cxnSpMk id="4" creationId="{110BF465-1288-042E-F31E-700838545D63}"/>
-          </ac:cxnSpMkLst>
-        </pc:cxnChg>
         <pc:cxnChg chg="add mod">
           <ac:chgData name="Jonathan Bollig" userId="8b5d0afe-f106-45e0-8c3f-fd98fa124db1" providerId="ADAL" clId="{B2469FA9-EBD8-4834-A16D-CBF8EFC907DD}" dt="2025-10-04T16:27:33.033" v="1615" actId="1076"/>
           <ac:cxnSpMkLst>
@@ -495,46 +439,6 @@
           <pc:docMk/>
           <pc:sldMk cId="4143755219" sldId="272"/>
         </pc:sldMkLst>
-        <pc:spChg chg="mod">
-          <ac:chgData name="Jonathan Bollig" userId="8b5d0afe-f106-45e0-8c3f-fd98fa124db1" providerId="ADAL" clId="{B2469FA9-EBD8-4834-A16D-CBF8EFC907DD}" dt="2025-10-04T16:21:00.241" v="1492" actId="20577"/>
-          <ac:spMkLst>
-            <pc:docMk/>
-            <pc:sldMk cId="4143755219" sldId="272"/>
-            <ac:spMk id="2" creationId="{D18DAEE6-E943-AA2D-D06E-3F4EE7CEE214}"/>
-          </ac:spMkLst>
-        </pc:spChg>
-        <pc:spChg chg="del">
-          <ac:chgData name="Jonathan Bollig" userId="8b5d0afe-f106-45e0-8c3f-fd98fa124db1" providerId="ADAL" clId="{B2469FA9-EBD8-4834-A16D-CBF8EFC907DD}" dt="2025-10-04T16:12:29.695" v="1058" actId="3680"/>
-          <ac:spMkLst>
-            <pc:docMk/>
-            <pc:sldMk cId="4143755219" sldId="272"/>
-            <ac:spMk id="3" creationId="{B3E33510-E69F-69B7-868E-7B36F9125218}"/>
-          </ac:spMkLst>
-        </pc:spChg>
-        <pc:spChg chg="add del mod">
-          <ac:chgData name="Jonathan Bollig" userId="8b5d0afe-f106-45e0-8c3f-fd98fa124db1" providerId="ADAL" clId="{B2469FA9-EBD8-4834-A16D-CBF8EFC907DD}" dt="2025-10-04T16:15:37.750" v="1193" actId="3680"/>
-          <ac:spMkLst>
-            <pc:docMk/>
-            <pc:sldMk cId="4143755219" sldId="272"/>
-            <ac:spMk id="6" creationId="{B18F7C1A-0593-460A-F2FD-2168F289C4A5}"/>
-          </ac:spMkLst>
-        </pc:spChg>
-        <pc:graphicFrameChg chg="add del mod ord modGraphic">
-          <ac:chgData name="Jonathan Bollig" userId="8b5d0afe-f106-45e0-8c3f-fd98fa124db1" providerId="ADAL" clId="{B2469FA9-EBD8-4834-A16D-CBF8EFC907DD}" dt="2025-10-04T16:15:29.996" v="1192" actId="478"/>
-          <ac:graphicFrameMkLst>
-            <pc:docMk/>
-            <pc:sldMk cId="4143755219" sldId="272"/>
-            <ac:graphicFrameMk id="4" creationId="{FAC9DAB7-8229-01E2-06DE-FC88B5038AC1}"/>
-          </ac:graphicFrameMkLst>
-        </pc:graphicFrameChg>
-        <pc:graphicFrameChg chg="add mod ord modGraphic">
-          <ac:chgData name="Jonathan Bollig" userId="8b5d0afe-f106-45e0-8c3f-fd98fa124db1" providerId="ADAL" clId="{B2469FA9-EBD8-4834-A16D-CBF8EFC907DD}" dt="2025-10-04T16:19:27.990" v="1481" actId="2161"/>
-          <ac:graphicFrameMkLst>
-            <pc:docMk/>
-            <pc:sldMk cId="4143755219" sldId="272"/>
-            <ac:graphicFrameMk id="7" creationId="{2E8553D1-2492-B666-245A-173AA2C652DE}"/>
-          </ac:graphicFrameMkLst>
-        </pc:graphicFrameChg>
       </pc:sldChg>
       <pc:sldChg chg="addSp delSp modSp new mod">
         <pc:chgData name="Jonathan Bollig" userId="8b5d0afe-f106-45e0-8c3f-fd98fa124db1" providerId="ADAL" clId="{B2469FA9-EBD8-4834-A16D-CBF8EFC907DD}" dt="2025-10-04T16:45:02.511" v="1988" actId="1076"/>
@@ -558,14 +462,6 @@
             <ac:spMk id="3" creationId="{FFA45445-01F5-7643-C535-1FDEB7F30B50}"/>
           </ac:spMkLst>
         </pc:spChg>
-        <pc:picChg chg="add del mod ord">
-          <ac:chgData name="Jonathan Bollig" userId="8b5d0afe-f106-45e0-8c3f-fd98fa124db1" providerId="ADAL" clId="{B2469FA9-EBD8-4834-A16D-CBF8EFC907DD}" dt="2025-10-04T16:30:38.780" v="1696" actId="22"/>
-          <ac:picMkLst>
-            <pc:docMk/>
-            <pc:sldMk cId="3250739031" sldId="273"/>
-            <ac:picMk id="5" creationId="{02C41BC1-0B23-F330-A78C-647F2479451C}"/>
-          </ac:picMkLst>
-        </pc:picChg>
         <pc:picChg chg="add mod">
           <ac:chgData name="Jonathan Bollig" userId="8b5d0afe-f106-45e0-8c3f-fd98fa124db1" providerId="ADAL" clId="{B2469FA9-EBD8-4834-A16D-CBF8EFC907DD}" dt="2025-10-04T16:45:00.011" v="1986" actId="14100"/>
           <ac:picMkLst>
@@ -652,22 +548,6 @@
             <ac:picMk id="5" creationId="{C97ACB50-E45E-5905-97C5-6E92555D0540}"/>
           </ac:picMkLst>
         </pc:picChg>
-        <pc:picChg chg="del">
-          <ac:chgData name="Jonathan Bollig" userId="8b5d0afe-f106-45e0-8c3f-fd98fa124db1" providerId="ADAL" clId="{B2469FA9-EBD8-4834-A16D-CBF8EFC907DD}" dt="2025-10-04T16:53:26.522" v="2155" actId="478"/>
-          <ac:picMkLst>
-            <pc:docMk/>
-            <pc:sldMk cId="794917453" sldId="275"/>
-            <ac:picMk id="7" creationId="{0553F7DC-D01C-784A-30B5-7169C65054C1}"/>
-          </ac:picMkLst>
-        </pc:picChg>
-        <pc:picChg chg="del">
-          <ac:chgData name="Jonathan Bollig" userId="8b5d0afe-f106-45e0-8c3f-fd98fa124db1" providerId="ADAL" clId="{B2469FA9-EBD8-4834-A16D-CBF8EFC907DD}" dt="2025-10-04T16:53:28.246" v="2156" actId="478"/>
-          <ac:picMkLst>
-            <pc:docMk/>
-            <pc:sldMk cId="794917453" sldId="275"/>
-            <ac:picMk id="9" creationId="{D4952526-366C-E572-B9FF-5DD30C306A3F}"/>
-          </ac:picMkLst>
-        </pc:picChg>
       </pc:sldChg>
       <pc:sldChg chg="modSp new del mod">
         <pc:chgData name="Jonathan Bollig" userId="8b5d0afe-f106-45e0-8c3f-fd98fa124db1" providerId="ADAL" clId="{B2469FA9-EBD8-4834-A16D-CBF8EFC907DD}" dt="2025-10-04T16:58:09.089" v="2272" actId="47"/>
@@ -675,22 +555,6 @@
           <pc:docMk/>
           <pc:sldMk cId="128840227" sldId="276"/>
         </pc:sldMkLst>
-        <pc:spChg chg="mod">
-          <ac:chgData name="Jonathan Bollig" userId="8b5d0afe-f106-45e0-8c3f-fd98fa124db1" providerId="ADAL" clId="{B2469FA9-EBD8-4834-A16D-CBF8EFC907DD}" dt="2025-10-04T16:57:16.898" v="2249" actId="20577"/>
-          <ac:spMkLst>
-            <pc:docMk/>
-            <pc:sldMk cId="128840227" sldId="276"/>
-            <ac:spMk id="2" creationId="{056D8967-94F6-0D40-00AE-59C2FC57CA86}"/>
-          </ac:spMkLst>
-        </pc:spChg>
-        <pc:spChg chg="mod">
-          <ac:chgData name="Jonathan Bollig" userId="8b5d0afe-f106-45e0-8c3f-fd98fa124db1" providerId="ADAL" clId="{B2469FA9-EBD8-4834-A16D-CBF8EFC907DD}" dt="2025-10-04T16:58:06.175" v="2271" actId="5793"/>
-          <ac:spMkLst>
-            <pc:docMk/>
-            <pc:sldMk cId="128840227" sldId="276"/>
-            <ac:spMk id="3" creationId="{8C7DD151-A7CF-B95D-551C-3894105B24F1}"/>
-          </ac:spMkLst>
-        </pc:spChg>
       </pc:sldChg>
       <pc:sldChg chg="modSp new mod">
         <pc:chgData name="Jonathan Bollig" userId="8b5d0afe-f106-45e0-8c3f-fd98fa124db1" providerId="ADAL" clId="{B2469FA9-EBD8-4834-A16D-CBF8EFC907DD}" dt="2025-10-05T11:02:02.503" v="3021" actId="20577"/>
@@ -895,7 +759,7 @@
           <a:p>
             <a:fld id="{0B6CA2EE-5589-4682-AD7F-744DBF1E81F5}" type="datetimeFigureOut">
               <a:rPr lang="de-DE" smtClean="0"/>
-              <a:t>04.10.2025</a:t>
+              <a:t>07.10.2025</a:t>
             </a:fld>
             <a:endParaRPr lang="de-DE"/>
           </a:p>
@@ -1309,7 +1173,7 @@
           <a:p>
             <a:fld id="{ADA51F25-4808-47F4-BF6E-BCDC230DB01C}" type="datetimeFigureOut">
               <a:rPr lang="de-DE" smtClean="0"/>
-              <a:t>04.10.2025</a:t>
+              <a:t>07.10.2025</a:t>
             </a:fld>
             <a:endParaRPr lang="de-DE"/>
           </a:p>
@@ -1507,7 +1371,7 @@
           <a:p>
             <a:fld id="{ADA51F25-4808-47F4-BF6E-BCDC230DB01C}" type="datetimeFigureOut">
               <a:rPr lang="de-DE" smtClean="0"/>
-              <a:t>04.10.2025</a:t>
+              <a:t>07.10.2025</a:t>
             </a:fld>
             <a:endParaRPr lang="de-DE"/>
           </a:p>
@@ -1715,7 +1579,7 @@
           <a:p>
             <a:fld id="{ADA51F25-4808-47F4-BF6E-BCDC230DB01C}" type="datetimeFigureOut">
               <a:rPr lang="de-DE" smtClean="0"/>
-              <a:t>04.10.2025</a:t>
+              <a:t>07.10.2025</a:t>
             </a:fld>
             <a:endParaRPr lang="de-DE"/>
           </a:p>
@@ -1913,7 +1777,7 @@
           <a:p>
             <a:fld id="{ADA51F25-4808-47F4-BF6E-BCDC230DB01C}" type="datetimeFigureOut">
               <a:rPr lang="de-DE" smtClean="0"/>
-              <a:t>04.10.2025</a:t>
+              <a:t>07.10.2025</a:t>
             </a:fld>
             <a:endParaRPr lang="de-DE"/>
           </a:p>
@@ -2188,7 +2052,7 @@
           <a:p>
             <a:fld id="{ADA51F25-4808-47F4-BF6E-BCDC230DB01C}" type="datetimeFigureOut">
               <a:rPr lang="de-DE" smtClean="0"/>
-              <a:t>04.10.2025</a:t>
+              <a:t>07.10.2025</a:t>
             </a:fld>
             <a:endParaRPr lang="de-DE"/>
           </a:p>
@@ -2453,7 +2317,7 @@
           <a:p>
             <a:fld id="{ADA51F25-4808-47F4-BF6E-BCDC230DB01C}" type="datetimeFigureOut">
               <a:rPr lang="de-DE" smtClean="0"/>
-              <a:t>04.10.2025</a:t>
+              <a:t>07.10.2025</a:t>
             </a:fld>
             <a:endParaRPr lang="de-DE"/>
           </a:p>
@@ -2865,7 +2729,7 @@
           <a:p>
             <a:fld id="{ADA51F25-4808-47F4-BF6E-BCDC230DB01C}" type="datetimeFigureOut">
               <a:rPr lang="de-DE" smtClean="0"/>
-              <a:t>04.10.2025</a:t>
+              <a:t>07.10.2025</a:t>
             </a:fld>
             <a:endParaRPr lang="de-DE"/>
           </a:p>
@@ -3006,7 +2870,7 @@
           <a:p>
             <a:fld id="{ADA51F25-4808-47F4-BF6E-BCDC230DB01C}" type="datetimeFigureOut">
               <a:rPr lang="de-DE" smtClean="0"/>
-              <a:t>04.10.2025</a:t>
+              <a:t>07.10.2025</a:t>
             </a:fld>
             <a:endParaRPr lang="de-DE"/>
           </a:p>
@@ -3119,7 +2983,7 @@
           <a:p>
             <a:fld id="{ADA51F25-4808-47F4-BF6E-BCDC230DB01C}" type="datetimeFigureOut">
               <a:rPr lang="de-DE" smtClean="0"/>
-              <a:t>04.10.2025</a:t>
+              <a:t>07.10.2025</a:t>
             </a:fld>
             <a:endParaRPr lang="de-DE"/>
           </a:p>
@@ -3430,7 +3294,7 @@
           <a:p>
             <a:fld id="{ADA51F25-4808-47F4-BF6E-BCDC230DB01C}" type="datetimeFigureOut">
               <a:rPr lang="de-DE" smtClean="0"/>
-              <a:t>04.10.2025</a:t>
+              <a:t>07.10.2025</a:t>
             </a:fld>
             <a:endParaRPr lang="de-DE"/>
           </a:p>
@@ -3718,7 +3582,7 @@
           <a:p>
             <a:fld id="{ADA51F25-4808-47F4-BF6E-BCDC230DB01C}" type="datetimeFigureOut">
               <a:rPr lang="de-DE" smtClean="0"/>
-              <a:t>04.10.2025</a:t>
+              <a:t>07.10.2025</a:t>
             </a:fld>
             <a:endParaRPr lang="de-DE"/>
           </a:p>
@@ -3959,7 +3823,7 @@
           <a:p>
             <a:fld id="{ADA51F25-4808-47F4-BF6E-BCDC230DB01C}" type="datetimeFigureOut">
               <a:rPr lang="de-DE" smtClean="0"/>
-              <a:t>04.10.2025</a:t>
+              <a:t>07.10.2025</a:t>
             </a:fld>
             <a:endParaRPr lang="de-DE"/>
           </a:p>
@@ -4464,9 +4328,10 @@
           </a:p>
           <a:p>
             <a:r>
-              <a:rPr lang="en-US" noProof="0" dirty="0"/>
-              <a:t>08.10.2025</a:t>
-            </a:r>
+              <a:rPr lang="en-US" noProof="0"/>
+              <a:t>09.10.2025</a:t>
+            </a:r>
+            <a:endParaRPr lang="en-US" noProof="0" dirty="0"/>
           </a:p>
         </p:txBody>
       </p:sp>

--- a/Lectures/Chunk 8  - 1D Numpy.pptx
+++ b/Lectures/Chunk 8  - 1D Numpy.pptx
@@ -221,7 +221,7 @@
   <pc:docChgLst>
     <pc:chgData name="Jonathan Bollig" userId="8b5d0afe-f106-45e0-8c3f-fd98fa124db1" providerId="ADAL" clId="{B2469FA9-EBD8-4834-A16D-CBF8EFC907DD}"/>
     <pc:docChg chg="undo custSel addSld delSld modSld">
-      <pc:chgData name="Jonathan Bollig" userId="8b5d0afe-f106-45e0-8c3f-fd98fa124db1" providerId="ADAL" clId="{B2469FA9-EBD8-4834-A16D-CBF8EFC907DD}" dt="2025-10-07T00:02:27.634" v="3072" actId="20577"/>
+      <pc:chgData name="Jonathan Bollig" userId="8b5d0afe-f106-45e0-8c3f-fd98fa124db1" providerId="ADAL" clId="{B2469FA9-EBD8-4834-A16D-CBF8EFC907DD}" dt="2025-10-07T16:25:25.139" v="3087" actId="20577"/>
       <pc:docMkLst>
         <pc:docMk/>
       </pc:docMkLst>
@@ -557,13 +557,13 @@
         </pc:sldMkLst>
       </pc:sldChg>
       <pc:sldChg chg="modSp new mod">
-        <pc:chgData name="Jonathan Bollig" userId="8b5d0afe-f106-45e0-8c3f-fd98fa124db1" providerId="ADAL" clId="{B2469FA9-EBD8-4834-A16D-CBF8EFC907DD}" dt="2025-10-05T11:02:02.503" v="3021" actId="20577"/>
+        <pc:chgData name="Jonathan Bollig" userId="8b5d0afe-f106-45e0-8c3f-fd98fa124db1" providerId="ADAL" clId="{B2469FA9-EBD8-4834-A16D-CBF8EFC907DD}" dt="2025-10-07T16:25:25.139" v="3087" actId="20577"/>
         <pc:sldMkLst>
           <pc:docMk/>
           <pc:sldMk cId="2146985610" sldId="276"/>
         </pc:sldMkLst>
         <pc:spChg chg="mod">
-          <ac:chgData name="Jonathan Bollig" userId="8b5d0afe-f106-45e0-8c3f-fd98fa124db1" providerId="ADAL" clId="{B2469FA9-EBD8-4834-A16D-CBF8EFC907DD}" dt="2025-10-05T11:02:02.503" v="3021" actId="20577"/>
+          <ac:chgData name="Jonathan Bollig" userId="8b5d0afe-f106-45e0-8c3f-fd98fa124db1" providerId="ADAL" clId="{B2469FA9-EBD8-4834-A16D-CBF8EFC907DD}" dt="2025-10-07T16:25:25.139" v="3087" actId="20577"/>
           <ac:spMkLst>
             <pc:docMk/>
             <pc:sldMk cId="2146985610" sldId="276"/>
@@ -5874,7 +5874,7 @@
           <a:p>
             <a:r>
               <a:rPr lang="en-US" dirty="0"/>
-              <a:t>Array Generation Functions</a:t>
+              <a:t>Live Coding: Array Generation Functions</a:t>
             </a:r>
             <a:endParaRPr lang="de-DE" dirty="0"/>
           </a:p>
